--- a/Schools_ML_Track/camp_2026/slides/DA/DA06.pptx
+++ b/Schools_ML_Track/camp_2026/slides/DA/DA06.pptx
@@ -128,7 +128,7 @@
   <p:extLst>
     <p:ext uri="{521415D9-36F7-43E2-AB2F-B90AF26B5E84}">
       <p14:sectionLst xmlns:p14="http://schemas.microsoft.com/office/powerpoint/2010/main">
-        <p14:section name="Opening" id="{b9bd6a1a-c7cc-b081-90f9-bc4d786351b9}">
+        <p14:section name="Opening" id="{8994f024-1716-1ec0-6d3f-e3358b222133}">
           <p14:sldIdLst>
             <p14:sldId id="256"/>
             <p14:sldId id="257"/>
@@ -139,7 +139,7 @@
             <p14:sldId id="262"/>
           </p14:sldIdLst>
         </p14:section>
-        <p14:section name="Block A" id="{888a05eb-6834-4e5f-7514-95d563275661}">
+        <p14:section name="Block A" id="{68bb3042-a3cd-a4d9-ac84-05fdecf4160f}">
           <p14:sldIdLst>
             <p14:sldId id="263"/>
             <p14:sldId id="264"/>
@@ -149,15 +149,15 @@
             <p14:sldId id="269"/>
           </p14:sldIdLst>
         </p14:section>
-        <p14:section name="Break" id="{85931c8c-d927-835b-e815-21e3a4f563be}">
+        <p14:section name="Break" id="{95a9b8a4-a43d-a0fb-d1e3-4ca8d7ca43a7}">
           <p14:sldIdLst>
             <p14:sldId id="267"/>
           </p14:sldIdLst>
         </p14:section>
-        <p14:section name="Block A" id="{069ab03d-b1d3-0c72-671b-57ee3e4de142}">
+        <p14:section name="Block A" id="{3aefce80-25fc-0ee1-8424-55be2529b735}">
           <p14:sldIdLst/>
         </p14:section>
-        <p14:section name="Block B" id="{56f07589-7e33-2fe0-e5c2-20e6bc522e5c}">
+        <p14:section name="Block B" id="{f1555d37-5512-1c55-dc11-119f6477131e}">
           <p14:sldIdLst>
             <p14:sldId id="270"/>
             <p14:sldId id="271"/>
@@ -166,7 +166,7 @@
             <p14:sldId id="274"/>
           </p14:sldIdLst>
         </p14:section>
-        <p14:section name="Make and close" id="{6f98d1dc-47d2-222a-cee1-9cd327d27757}">
+        <p14:section name="Make and close" id="{aa66f34d-85fa-3ac7-0b4e-8a81c2476fa6}">
           <p14:sldIdLst>
             <p14:sldId id="275"/>
             <p14:sldId id="276"/>

--- a/Schools_ML_Track/camp_2026/slides/DA/DA06.pptx
+++ b/Schools_ML_Track/camp_2026/slides/DA/DA06.pptx
@@ -128,7 +128,7 @@
   <p:extLst>
     <p:ext uri="{521415D9-36F7-43E2-AB2F-B90AF26B5E84}">
       <p14:sectionLst xmlns:p14="http://schemas.microsoft.com/office/powerpoint/2010/main">
-        <p14:section name="Opening" id="{8994f024-1716-1ec0-6d3f-e3358b222133}">
+        <p14:section name="Opening" id="{34848167-48f9-90aa-4c17-6875fd2c91c1}">
           <p14:sldIdLst>
             <p14:sldId id="256"/>
             <p14:sldId id="257"/>
@@ -139,7 +139,7 @@
             <p14:sldId id="262"/>
           </p14:sldIdLst>
         </p14:section>
-        <p14:section name="Block A" id="{68bb3042-a3cd-a4d9-ac84-05fdecf4160f}">
+        <p14:section name="Block A" id="{00654d12-72f8-f1ca-c482-a4725942779a}">
           <p14:sldIdLst>
             <p14:sldId id="263"/>
             <p14:sldId id="264"/>
@@ -149,15 +149,15 @@
             <p14:sldId id="269"/>
           </p14:sldIdLst>
         </p14:section>
-        <p14:section name="Break" id="{95a9b8a4-a43d-a0fb-d1e3-4ca8d7ca43a7}">
+        <p14:section name="Break" id="{4c566b84-ff45-eb56-673d-154aa6c06a96}">
           <p14:sldIdLst>
             <p14:sldId id="267"/>
           </p14:sldIdLst>
         </p14:section>
-        <p14:section name="Block A" id="{3aefce80-25fc-0ee1-8424-55be2529b735}">
+        <p14:section name="Block A" id="{4fa186a3-c6ab-3b7a-7951-01054b9687c2}">
           <p14:sldIdLst/>
         </p14:section>
-        <p14:section name="Block B" id="{f1555d37-5512-1c55-dc11-119f6477131e}">
+        <p14:section name="Block B" id="{b41d1b14-96ca-6b7a-02b3-a345f4e6957a}">
           <p14:sldIdLst>
             <p14:sldId id="270"/>
             <p14:sldId id="271"/>
@@ -166,7 +166,7 @@
             <p14:sldId id="274"/>
           </p14:sldIdLst>
         </p14:section>
-        <p14:section name="Make and close" id="{aa66f34d-85fa-3ac7-0b4e-8a81c2476fa6}">
+        <p14:section name="Make and close" id="{1994633f-86b3-5f00-7f17-fbfd837954f9}">
           <p14:sldIdLst>
             <p14:sldId id="275"/>
             <p14:sldId id="276"/>
@@ -3197,7 +3197,24 @@
                 <a:ea typeface="Lato" pitchFamily="34" charset="-122"/>
                 <a:cs typeface="Lato" pitchFamily="34" charset="-120"/>
               </a:rPr>
-              <a:t>Functions and checks that fail loudly</a:t>
+              <a:t>Functions and checks</a:t>
+            </a:r>
+            <a:endParaRPr lang="en-US" sz="5600" dirty="0"/>
+          </a:p>
+          <a:p>
+            <a:pPr algn="l" indent="0" marL="0">
+              <a:buNone/>
+            </a:pPr>
+            <a:r>
+              <a:rPr lang="en-US" sz="5600" b="1" dirty="0">
+                <a:solidFill>
+                  <a:srgbClr val="FFFFFF"/>
+                </a:solidFill>
+                <a:latin typeface="Lato" pitchFamily="34" charset="0"/>
+                <a:ea typeface="Lato" pitchFamily="34" charset="-122"/>
+                <a:cs typeface="Lato" pitchFamily="34" charset="-120"/>
+              </a:rPr>
+              <a:t>that fail loudly</a:t>
             </a:r>
             <a:endParaRPr lang="en-US" sz="5600" dirty="0"/>
           </a:p>
@@ -3373,265 +3390,40 @@
           </a:p>
         </p:txBody>
       </p:sp>
-      <p:sp>
-        <p:nvSpPr>
-          <p:cNvPr id="3" name="Shape 1"/>
-          <p:cNvSpPr/>
+      <p:pic>
+        <p:nvPicPr>
+          <p:cNvPr id="3" name="Image 0" descr="Look closely">    </p:cNvPr>
+          <p:cNvPicPr>
+            <a:picLocks noChangeAspect="1"/>
+          </p:cNvPicPr>
           <p:nvPr/>
-        </p:nvSpPr>
-        <p:spPr>
-          <a:xfrm>
-            <a:off x="7498080" y="1737360"/>
-            <a:ext cx="4023360" cy="1825752"/>
-          </a:xfrm>
-          <a:prstGeom prst="roundRect">
-            <a:avLst>
-              <a:gd name="adj" fmla="val 4007"/>
-            </a:avLst>
-          </a:prstGeom>
-          <a:solidFill>
-            <a:srgbClr val="111111"/>
-          </a:solidFill>
-          <a:ln/>
-        </p:spPr>
-      </p:sp>
-      <p:sp>
-        <p:nvSpPr>
-          <p:cNvPr id="4" name="Text 2"/>
+        </p:nvPicPr>
+        <p:blipFill>
+          <a:blip r:embed="rId1"/>
+          <a:stretch>
+            <a:fillRect/>
+          </a:stretch>
+        </p:blipFill>
+        <p:spPr>
+          <a:xfrm>
+            <a:off x="9875520" y="4480560"/>
+            <a:ext cx="1645920" cy="1645920"/>
+          </a:xfrm>
+          <a:prstGeom prst="rect">
+            <a:avLst/>
+          </a:prstGeom>
+        </p:spPr>
+      </p:pic>
+      <p:sp>
+        <p:nvSpPr>
+          <p:cNvPr id="4" name="Text 1"/>
           <p:cNvSpPr txBox="1"/>
           <p:nvPr/>
         </p:nvSpPr>
         <p:spPr>
           <a:xfrm>
-            <a:off x="7699248" y="1938528"/>
-            <a:ext cx="3621024" cy="1423416"/>
-          </a:xfrm>
-          <a:prstGeom prst="rect">
-            <a:avLst/>
-          </a:prstGeom>
-          <a:noFill/>
-          <a:ln/>
-        </p:spPr>
-        <p:txBody>
-          <a:bodyPr wrap="square" lIns="0" tIns="0" rIns="0" bIns="0" rtlCol="0" anchor="t"/>
-          <a:lstStyle/>
-          <a:p>
-            <a:pPr algn="l" indent="0" marL="0">
-              <a:lnSpc>
-                <a:spcPts val="1820"/>
-              </a:lnSpc>
-              <a:buNone/>
-            </a:pPr>
-            <a:r>
-              <a:rPr lang="en-US" sz="1400" b="1" dirty="0">
-                <a:solidFill>
-                  <a:srgbClr val="FFFFFF"/>
-                </a:solidFill>
-                <a:latin typeface="Courier New" pitchFamily="34" charset="0"/>
-                <a:ea typeface="Courier New" pitchFamily="34" charset="-122"/>
-                <a:cs typeface="Courier New" pitchFamily="34" charset="-120"/>
-              </a:rPr>
-              <a:t>def</a:t>
-            </a:r>
-            <a:pPr algn="l" indent="0" marL="0">
-              <a:lnSpc>
-                <a:spcPts val="1820"/>
-              </a:lnSpc>
-              <a:buNone/>
-            </a:pPr>
-            <a:r>
-              <a:rPr lang="en-US" sz="1400" dirty="0">
-                <a:solidFill>
-                  <a:srgbClr val="FFFFFF"/>
-                </a:solidFill>
-                <a:latin typeface="Courier New" pitchFamily="34" charset="0"/>
-                <a:ea typeface="Courier New" pitchFamily="34" charset="-122"/>
-                <a:cs typeface="Courier New" pitchFamily="34" charset="-120"/>
-              </a:rPr>
-              <a:t> revenue(units, price):</a:t>
-            </a:r>
-            <a:endParaRPr lang="en-US" sz="1400" dirty="0"/>
-          </a:p>
-          <a:p>
-            <a:pPr algn="l" indent="0" marL="0">
-              <a:lnSpc>
-                <a:spcPts val="1820"/>
-              </a:lnSpc>
-              <a:buNone/>
-            </a:pPr>
-            <a:r>
-              <a:rPr lang="en-US" sz="1400" dirty="0">
-                <a:solidFill>
-                  <a:srgbClr val="FFFFFF"/>
-                </a:solidFill>
-                <a:latin typeface="Courier New" pitchFamily="34" charset="0"/>
-                <a:ea typeface="Courier New" pitchFamily="34" charset="-122"/>
-                <a:cs typeface="Courier New" pitchFamily="34" charset="-120"/>
-              </a:rPr>
-              <a:t>    </a:t>
-            </a:r>
-            <a:pPr algn="l" indent="0" marL="0">
-              <a:lnSpc>
-                <a:spcPts val="1820"/>
-              </a:lnSpc>
-              <a:buNone/>
-            </a:pPr>
-            <a:r>
-              <a:rPr lang="en-US" sz="1400" b="1" dirty="0">
-                <a:solidFill>
-                  <a:srgbClr val="FFFFFF"/>
-                </a:solidFill>
-                <a:latin typeface="Courier New" pitchFamily="34" charset="0"/>
-                <a:ea typeface="Courier New" pitchFamily="34" charset="-122"/>
-                <a:cs typeface="Courier New" pitchFamily="34" charset="-120"/>
-              </a:rPr>
-              <a:t>return</a:t>
-            </a:r>
-            <a:pPr algn="l" indent="0" marL="0">
-              <a:lnSpc>
-                <a:spcPts val="1820"/>
-              </a:lnSpc>
-              <a:buNone/>
-            </a:pPr>
-            <a:r>
-              <a:rPr lang="en-US" sz="1400" dirty="0">
-                <a:solidFill>
-                  <a:srgbClr val="FFFFFF"/>
-                </a:solidFill>
-                <a:latin typeface="Courier New" pitchFamily="34" charset="0"/>
-                <a:ea typeface="Courier New" pitchFamily="34" charset="-122"/>
-                <a:cs typeface="Courier New" pitchFamily="34" charset="-120"/>
-              </a:rPr>
-              <a:t> units * price</a:t>
-            </a:r>
-            <a:endParaRPr lang="en-US" sz="1400" dirty="0"/>
-          </a:p>
-          <a:p>
-            <a:pPr algn="l" indent="0" marL="0">
-              <a:lnSpc>
-                <a:spcPts val="1820"/>
-              </a:lnSpc>
-              <a:buNone/>
-            </a:pPr>
-            <a:r>
-              <a:rPr lang="en-US" sz="1400" dirty="0">
-                <a:solidFill>
-                  <a:srgbClr val="FFFFFF"/>
-                </a:solidFill>
-                <a:latin typeface="Courier New" pitchFamily="34" charset="0"/>
-                <a:ea typeface="Courier New" pitchFamily="34" charset="-122"/>
-                <a:cs typeface="Courier New" pitchFamily="34" charset="-120"/>
-              </a:rPr>
-              <a:t> </a:t>
-            </a:r>
-            <a:endParaRPr lang="en-US" sz="1400" dirty="0"/>
-          </a:p>
-          <a:p>
-            <a:pPr algn="l" indent="0" marL="0">
-              <a:lnSpc>
-                <a:spcPts val="1820"/>
-              </a:lnSpc>
-              <a:buNone/>
-            </a:pPr>
-            <a:r>
-              <a:rPr lang="en-US" sz="1400" dirty="0">
-                <a:solidFill>
-                  <a:srgbClr val="FFFFFF"/>
-                </a:solidFill>
-                <a:latin typeface="Courier New" pitchFamily="34" charset="0"/>
-                <a:ea typeface="Courier New" pitchFamily="34" charset="-122"/>
-                <a:cs typeface="Courier New" pitchFamily="34" charset="-120"/>
-              </a:rPr>
-              <a:t>print(revenue(3, 2000))</a:t>
-            </a:r>
-            <a:endParaRPr lang="en-US" sz="1400" dirty="0"/>
-          </a:p>
-          <a:p>
-            <a:pPr algn="l" indent="0" marL="0">
-              <a:lnSpc>
-                <a:spcPts val="1820"/>
-              </a:lnSpc>
-              <a:buNone/>
-            </a:pPr>
-            <a:r>
-              <a:rPr lang="en-US" sz="1400" b="1" dirty="0">
-                <a:solidFill>
-                  <a:srgbClr val="FFFFFF"/>
-                </a:solidFill>
-                <a:latin typeface="Courier New" pitchFamily="34" charset="0"/>
-                <a:ea typeface="Courier New" pitchFamily="34" charset="-122"/>
-                <a:cs typeface="Courier New" pitchFamily="34" charset="-120"/>
-              </a:rPr>
-              <a:t>assert</a:t>
-            </a:r>
-            <a:pPr algn="l" indent="0" marL="0">
-              <a:lnSpc>
-                <a:spcPts val="1820"/>
-              </a:lnSpc>
-              <a:buNone/>
-            </a:pPr>
-            <a:r>
-              <a:rPr lang="en-US" sz="1400" dirty="0">
-                <a:solidFill>
-                  <a:srgbClr val="FFFFFF"/>
-                </a:solidFill>
-                <a:latin typeface="Courier New" pitchFamily="34" charset="0"/>
-                <a:ea typeface="Courier New" pitchFamily="34" charset="-122"/>
-                <a:cs typeface="Courier New" pitchFamily="34" charset="-120"/>
-              </a:rPr>
-              <a:t> revenue(3, 2000) == 6000</a:t>
-            </a:r>
-            <a:endParaRPr lang="en-US" sz="1400" dirty="0"/>
-          </a:p>
-          <a:p>
-            <a:pPr algn="l" indent="0" marL="0">
-              <a:lnSpc>
-                <a:spcPts val="1820"/>
-              </a:lnSpc>
-              <a:buNone/>
-            </a:pPr>
-            <a:r>
-              <a:rPr lang="en-US" sz="1400" b="1" dirty="0">
-                <a:solidFill>
-                  <a:srgbClr val="FFFFFF"/>
-                </a:solidFill>
-                <a:latin typeface="Courier New" pitchFamily="34" charset="0"/>
-                <a:ea typeface="Courier New" pitchFamily="34" charset="-122"/>
-                <a:cs typeface="Courier New" pitchFamily="34" charset="-120"/>
-              </a:rPr>
-              <a:t>assert</a:t>
-            </a:r>
-            <a:pPr algn="l" indent="0" marL="0">
-              <a:lnSpc>
-                <a:spcPts val="1820"/>
-              </a:lnSpc>
-              <a:buNone/>
-            </a:pPr>
-            <a:r>
-              <a:rPr lang="en-US" sz="1400" dirty="0">
-                <a:solidFill>
-                  <a:srgbClr val="FFFFFF"/>
-                </a:solidFill>
-                <a:latin typeface="Courier New" pitchFamily="34" charset="0"/>
-                <a:ea typeface="Courier New" pitchFamily="34" charset="-122"/>
-                <a:cs typeface="Courier New" pitchFamily="34" charset="-120"/>
-              </a:rPr>
-              <a:t> revenue(0, 2000) == 0</a:t>
-            </a:r>
-            <a:endParaRPr lang="en-US" sz="1400" dirty="0"/>
-          </a:p>
-        </p:txBody>
-      </p:sp>
-      <p:sp>
-        <p:nvSpPr>
-          <p:cNvPr id="5" name="Text 3"/>
-          <p:cNvSpPr txBox="1"/>
-          <p:nvPr/>
-        </p:nvSpPr>
-        <p:spPr>
-          <a:xfrm>
             <a:off x="640080" y="1737360"/>
-            <a:ext cx="6400800" cy="4389120"/>
+            <a:ext cx="8961120" cy="4389120"/>
           </a:xfrm>
           <a:prstGeom prst="rect">
             <a:avLst/>
@@ -3872,255 +3664,30 @@
           </a:p>
         </p:txBody>
       </p:sp>
-      <p:sp>
-        <p:nvSpPr>
-          <p:cNvPr id="4" name="Shape 2"/>
-          <p:cNvSpPr/>
+      <p:pic>
+        <p:nvPicPr>
+          <p:cNvPr id="4" name="Image 0" descr="Change one thing">    </p:cNvPr>
+          <p:cNvPicPr>
+            <a:picLocks noChangeAspect="1"/>
+          </p:cNvPicPr>
           <p:nvPr/>
-        </p:nvSpPr>
-        <p:spPr>
-          <a:xfrm>
-            <a:off x="7223760" y="1737360"/>
-            <a:ext cx="4297680" cy="1924812"/>
-          </a:xfrm>
-          <a:prstGeom prst="roundRect">
-            <a:avLst>
-              <a:gd name="adj" fmla="val 3800"/>
-            </a:avLst>
-          </a:prstGeom>
-          <a:solidFill>
-            <a:srgbClr val="111111"/>
-          </a:solidFill>
-          <a:ln/>
-        </p:spPr>
-      </p:sp>
-      <p:sp>
-        <p:nvSpPr>
-          <p:cNvPr id="5" name="Text 3"/>
-          <p:cNvSpPr txBox="1"/>
-          <p:nvPr/>
-        </p:nvSpPr>
-        <p:spPr>
-          <a:xfrm>
-            <a:off x="7424928" y="1938528"/>
-            <a:ext cx="3895344" cy="1522476"/>
-          </a:xfrm>
-          <a:prstGeom prst="rect">
-            <a:avLst/>
-          </a:prstGeom>
-          <a:noFill/>
-          <a:ln/>
-        </p:spPr>
-        <p:txBody>
-          <a:bodyPr wrap="square" lIns="0" tIns="0" rIns="0" bIns="0" rtlCol="0" anchor="t"/>
-          <a:lstStyle/>
-          <a:p>
-            <a:pPr algn="l" indent="0" marL="0">
-              <a:lnSpc>
-                <a:spcPts val="1950"/>
-              </a:lnSpc>
-              <a:buNone/>
-            </a:pPr>
-            <a:r>
-              <a:rPr lang="en-US" sz="1500" b="1" dirty="0">
-                <a:solidFill>
-                  <a:srgbClr val="FFFFFF"/>
-                </a:solidFill>
-                <a:latin typeface="Courier New" pitchFamily="34" charset="0"/>
-                <a:ea typeface="Courier New" pitchFamily="34" charset="-122"/>
-                <a:cs typeface="Courier New" pitchFamily="34" charset="-120"/>
-              </a:rPr>
-              <a:t>def</a:t>
-            </a:r>
-            <a:pPr algn="l" indent="0" marL="0">
-              <a:lnSpc>
-                <a:spcPts val="1950"/>
-              </a:lnSpc>
-              <a:buNone/>
-            </a:pPr>
-            <a:r>
-              <a:rPr lang="en-US" sz="1500" dirty="0">
-                <a:solidFill>
-                  <a:srgbClr val="FFFFFF"/>
-                </a:solidFill>
-                <a:latin typeface="Courier New" pitchFamily="34" charset="0"/>
-                <a:ea typeface="Courier New" pitchFamily="34" charset="-122"/>
-                <a:cs typeface="Courier New" pitchFamily="34" charset="-120"/>
-              </a:rPr>
-              <a:t> revenue(units, price):</a:t>
-            </a:r>
-            <a:endParaRPr lang="en-US" sz="1500" dirty="0"/>
-          </a:p>
-          <a:p>
-            <a:pPr algn="l" indent="0" marL="0">
-              <a:lnSpc>
-                <a:spcPts val="1950"/>
-              </a:lnSpc>
-              <a:buNone/>
-            </a:pPr>
-            <a:r>
-              <a:rPr lang="en-US" sz="1500" dirty="0">
-                <a:solidFill>
-                  <a:srgbClr val="FFFFFF"/>
-                </a:solidFill>
-                <a:latin typeface="Courier New" pitchFamily="34" charset="0"/>
-                <a:ea typeface="Courier New" pitchFamily="34" charset="-122"/>
-                <a:cs typeface="Courier New" pitchFamily="34" charset="-120"/>
-              </a:rPr>
-              <a:t>    </a:t>
-            </a:r>
-            <a:pPr algn="l" indent="0" marL="0">
-              <a:lnSpc>
-                <a:spcPts val="1950"/>
-              </a:lnSpc>
-              <a:buNone/>
-            </a:pPr>
-            <a:r>
-              <a:rPr lang="en-US" sz="1500" b="1" dirty="0">
-                <a:solidFill>
-                  <a:srgbClr val="FFFFFF"/>
-                </a:solidFill>
-                <a:latin typeface="Courier New" pitchFamily="34" charset="0"/>
-                <a:ea typeface="Courier New" pitchFamily="34" charset="-122"/>
-                <a:cs typeface="Courier New" pitchFamily="34" charset="-120"/>
-              </a:rPr>
-              <a:t>return</a:t>
-            </a:r>
-            <a:pPr algn="l" indent="0" marL="0">
-              <a:lnSpc>
-                <a:spcPts val="1950"/>
-              </a:lnSpc>
-              <a:buNone/>
-            </a:pPr>
-            <a:r>
-              <a:rPr lang="en-US" sz="1500" dirty="0">
-                <a:solidFill>
-                  <a:srgbClr val="FFFFFF"/>
-                </a:solidFill>
-                <a:latin typeface="Courier New" pitchFamily="34" charset="0"/>
-                <a:ea typeface="Courier New" pitchFamily="34" charset="-122"/>
-                <a:cs typeface="Courier New" pitchFamily="34" charset="-120"/>
-              </a:rPr>
-              <a:t> units * price</a:t>
-            </a:r>
-            <a:endParaRPr lang="en-US" sz="1500" dirty="0"/>
-          </a:p>
-          <a:p>
-            <a:pPr algn="l" indent="0" marL="0">
-              <a:lnSpc>
-                <a:spcPts val="1950"/>
-              </a:lnSpc>
-              <a:buNone/>
-            </a:pPr>
-            <a:r>
-              <a:rPr lang="en-US" sz="1500" dirty="0">
-                <a:solidFill>
-                  <a:srgbClr val="FFFFFF"/>
-                </a:solidFill>
-                <a:latin typeface="Courier New" pitchFamily="34" charset="0"/>
-                <a:ea typeface="Courier New" pitchFamily="34" charset="-122"/>
-                <a:cs typeface="Courier New" pitchFamily="34" charset="-120"/>
-              </a:rPr>
-              <a:t> </a:t>
-            </a:r>
-            <a:endParaRPr lang="en-US" sz="1500" dirty="0"/>
-          </a:p>
-          <a:p>
-            <a:pPr algn="l" indent="0" marL="0">
-              <a:lnSpc>
-                <a:spcPts val="1950"/>
-              </a:lnSpc>
-              <a:buNone/>
-            </a:pPr>
-            <a:r>
-              <a:rPr lang="en-US" sz="1500" dirty="0">
-                <a:solidFill>
-                  <a:srgbClr val="FFFFFF"/>
-                </a:solidFill>
-                <a:latin typeface="Courier New" pitchFamily="34" charset="0"/>
-                <a:ea typeface="Courier New" pitchFamily="34" charset="-122"/>
-                <a:cs typeface="Courier New" pitchFamily="34" charset="-120"/>
-              </a:rPr>
-              <a:t>print(revenue(3, 2000))</a:t>
-            </a:r>
-            <a:endParaRPr lang="en-US" sz="1500" dirty="0"/>
-          </a:p>
-          <a:p>
-            <a:pPr algn="l" indent="0" marL="0">
-              <a:lnSpc>
-                <a:spcPts val="1950"/>
-              </a:lnSpc>
-              <a:buNone/>
-            </a:pPr>
-            <a:r>
-              <a:rPr lang="en-US" sz="1500" b="1" dirty="0">
-                <a:solidFill>
-                  <a:srgbClr val="FFFFFF"/>
-                </a:solidFill>
-                <a:latin typeface="Courier New" pitchFamily="34" charset="0"/>
-                <a:ea typeface="Courier New" pitchFamily="34" charset="-122"/>
-                <a:cs typeface="Courier New" pitchFamily="34" charset="-120"/>
-              </a:rPr>
-              <a:t>assert</a:t>
-            </a:r>
-            <a:pPr algn="l" indent="0" marL="0">
-              <a:lnSpc>
-                <a:spcPts val="1950"/>
-              </a:lnSpc>
-              <a:buNone/>
-            </a:pPr>
-            <a:r>
-              <a:rPr lang="en-US" sz="1500" dirty="0">
-                <a:solidFill>
-                  <a:srgbClr val="FFFFFF"/>
-                </a:solidFill>
-                <a:latin typeface="Courier New" pitchFamily="34" charset="0"/>
-                <a:ea typeface="Courier New" pitchFamily="34" charset="-122"/>
-                <a:cs typeface="Courier New" pitchFamily="34" charset="-120"/>
-              </a:rPr>
-              <a:t> revenue(3, 2000) == 6000</a:t>
-            </a:r>
-            <a:endParaRPr lang="en-US" sz="1500" dirty="0"/>
-          </a:p>
-          <a:p>
-            <a:pPr algn="l" indent="0" marL="0">
-              <a:lnSpc>
-                <a:spcPts val="1950"/>
-              </a:lnSpc>
-              <a:buNone/>
-            </a:pPr>
-            <a:r>
-              <a:rPr lang="en-US" sz="1500" b="1" dirty="0">
-                <a:solidFill>
-                  <a:srgbClr val="FFFFFF"/>
-                </a:solidFill>
-                <a:latin typeface="Courier New" pitchFamily="34" charset="0"/>
-                <a:ea typeface="Courier New" pitchFamily="34" charset="-122"/>
-                <a:cs typeface="Courier New" pitchFamily="34" charset="-120"/>
-              </a:rPr>
-              <a:t>assert</a:t>
-            </a:r>
-            <a:pPr algn="l" indent="0" marL="0">
-              <a:lnSpc>
-                <a:spcPts val="1950"/>
-              </a:lnSpc>
-              <a:buNone/>
-            </a:pPr>
-            <a:r>
-              <a:rPr lang="en-US" sz="1500" dirty="0">
-                <a:solidFill>
-                  <a:srgbClr val="FFFFFF"/>
-                </a:solidFill>
-                <a:latin typeface="Courier New" pitchFamily="34" charset="0"/>
-                <a:ea typeface="Courier New" pitchFamily="34" charset="-122"/>
-                <a:cs typeface="Courier New" pitchFamily="34" charset="-120"/>
-              </a:rPr>
-              <a:t> revenue(0, 2000) == 0</a:t>
-            </a:r>
-            <a:endParaRPr lang="en-US" sz="1500" dirty="0"/>
-          </a:p>
-        </p:txBody>
-      </p:sp>
+        </p:nvPicPr>
+        <p:blipFill>
+          <a:blip r:embed="rId1"/>
+          <a:stretch>
+            <a:fillRect/>
+          </a:stretch>
+        </p:blipFill>
+        <p:spPr>
+          <a:xfrm>
+            <a:off x="9418320" y="2103120"/>
+            <a:ext cx="1828800" cy="1828800"/>
+          </a:xfrm>
+          <a:prstGeom prst="rect">
+            <a:avLst/>
+          </a:prstGeom>
+        </p:spPr>
+      </p:pic>
       <p:sp>
         <p:nvSpPr>
           <p:cNvPr id="25" name="Slide Number Placeholder 0"/>
@@ -7197,15 +6764,15 @@
           <a:p>
             <a:pPr algn="l" indent="0" marL="0">
               <a:lnSpc>
-                <a:spcPts val="3480"/>
+                <a:spcPts val="3120"/>
               </a:lnSpc>
               <a:spcAft>
-                <a:spcPts val="2520"/>
+                <a:spcPts val="2020"/>
               </a:spcAft>
               <a:buNone/>
             </a:pPr>
             <a:r>
-              <a:rPr lang="en-US" sz="2900" dirty="0">
+              <a:rPr lang="en-US" sz="2600" dirty="0">
                 <a:solidFill>
                   <a:srgbClr val="111111"/>
                 </a:solidFill>
@@ -7213,22 +6780,22 @@
                 <a:ea typeface="Lato" pitchFamily="34" charset="-122"/>
                 <a:cs typeface="Lato" pitchFamily="34" charset="-120"/>
               </a:rPr>
-              <a:t>Write price_after_discount(price, percent) that returns the price after a percentage discount. Check it with assert for 0 percent, 10 percent and 100 percent on a price of 2000. Save the notebook and run all cells from the top.</a:t>
-            </a:r>
-            <a:endParaRPr lang="en-US" sz="2900" dirty="0"/>
-          </a:p>
-          <a:p>
-            <a:pPr algn="l" indent="0" marL="0">
-              <a:lnSpc>
-                <a:spcPts val="3480"/>
+              <a:t>Write price_after_discount(price, percent) that returns the price after a percentage discount.</a:t>
+            </a:r>
+            <a:endParaRPr lang="en-US" sz="2600" dirty="0"/>
+          </a:p>
+          <a:p>
+            <a:pPr algn="l" indent="0" marL="0">
+              <a:lnSpc>
+                <a:spcPts val="3120"/>
               </a:lnSpc>
               <a:spcAft>
-                <a:spcPts val="2520"/>
+                <a:spcPts val="2020"/>
               </a:spcAft>
               <a:buNone/>
             </a:pPr>
             <a:r>
-              <a:rPr lang="en-US" sz="2900" dirty="0">
+              <a:rPr lang="en-US" sz="2600" dirty="0">
                 <a:solidFill>
                   <a:srgbClr val="111111"/>
                 </a:solidFill>
@@ -7236,9 +6803,55 @@
                 <a:ea typeface="Lato" pitchFamily="34" charset="-122"/>
                 <a:cs typeface="Lato" pitchFamily="34" charset="-120"/>
               </a:rPr>
-              <a:t>Save it as DA06. Write two sentences: what you changed and how you checked it.</a:t>
-            </a:r>
-            <a:endParaRPr lang="en-US" sz="2900" dirty="0"/>
+              <a:t>Check it with assert for 0 percent, 10 percent and 100 percent on a price of 2000.</a:t>
+            </a:r>
+            <a:endParaRPr lang="en-US" sz="2600" dirty="0"/>
+          </a:p>
+          <a:p>
+            <a:pPr algn="l" indent="0" marL="0">
+              <a:lnSpc>
+                <a:spcPts val="3120"/>
+              </a:lnSpc>
+              <a:spcAft>
+                <a:spcPts val="2020"/>
+              </a:spcAft>
+              <a:buNone/>
+            </a:pPr>
+            <a:r>
+              <a:rPr lang="en-US" sz="2600" dirty="0">
+                <a:solidFill>
+                  <a:srgbClr val="111111"/>
+                </a:solidFill>
+                <a:latin typeface="Lato" pitchFamily="34" charset="0"/>
+                <a:ea typeface="Lato" pitchFamily="34" charset="-122"/>
+                <a:cs typeface="Lato" pitchFamily="34" charset="-120"/>
+              </a:rPr>
+              <a:t>Save the notebook and run all cells from the top.</a:t>
+            </a:r>
+            <a:endParaRPr lang="en-US" sz="2600" dirty="0"/>
+          </a:p>
+          <a:p>
+            <a:pPr algn="l" indent="0" marL="0">
+              <a:lnSpc>
+                <a:spcPts val="3120"/>
+              </a:lnSpc>
+              <a:spcAft>
+                <a:spcPts val="2020"/>
+              </a:spcAft>
+              <a:buNone/>
+            </a:pPr>
+            <a:r>
+              <a:rPr lang="en-US" sz="2600" dirty="0">
+                <a:solidFill>
+                  <a:srgbClr val="111111"/>
+                </a:solidFill>
+                <a:latin typeface="Lato" pitchFamily="34" charset="0"/>
+                <a:ea typeface="Lato" pitchFamily="34" charset="-122"/>
+                <a:cs typeface="Lato" pitchFamily="34" charset="-120"/>
+              </a:rPr>
+              <a:t>Write two sentences: what you changed and how you checked it.</a:t>
+            </a:r>
+            <a:endParaRPr lang="en-US" sz="2600" dirty="0"/>
           </a:p>
         </p:txBody>
       </p:sp>
